--- a/skills/presentations/assets/pptx/templates/08-period-start-planning.pptx
+++ b/skills/presentations/assets/pptx/templates/08-period-start-planning.pptx
@@ -5,15 +5,15 @@
     <p:sldMasterId xmlns:r="http://schemas.openxmlformats.org/officeDocument/2006/relationships" id="2147483648" r:id="rId1"/>
   </p:sldMasterIdLst>
   <p:notesMasterIdLst>
-    <p:notesMasterId r:id="Rd7e5057dff3a4426"/>
+    <p:notesMasterId r:id="Rde6def3b69344a22"/>
   </p:notesMasterIdLst>
   <p:sldIdLst>
-    <p:sldId id="256" r:id="R700548a5b9b1483f"/>
-    <p:sldId id="257" r:id="R5f383614932c43c0"/>
-    <p:sldId id="258" r:id="R6bfa8d5940d841b6"/>
-    <p:sldId id="259" r:id="R4cae1cf7e9b142cc"/>
-    <p:sldId id="260" r:id="R05e4df03f52c40bc"/>
-    <p:sldId id="261" r:id="R69a3bd5e9f0d44bc"/>
+    <p:sldId id="256" r:id="R1d37716b2b6a4e7c"/>
+    <p:sldId id="257" r:id="R94ee387758934c99"/>
+    <p:sldId id="258" r:id="Rda16468cc3d34b8e"/>
+    <p:sldId id="259" r:id="R50bd07de6b0f459a"/>
+    <p:sldId id="260" r:id="Ra7fde7e5712142ac"/>
+    <p:sldId id="261" r:id="R1c48d96a4310473d"/>
   </p:sldIdLst>
   <p:sldSz cx="12192000" cy="6858000"/>
   <p:notesSz cx="6858000" cy="9144000"/>

--- a/skills/presentations/assets/pptx/templates/08-period-start-planning.pptx
+++ b/skills/presentations/assets/pptx/templates/08-period-start-planning.pptx
@@ -5,15 +5,16 @@
     <p:sldMasterId xmlns:r="http://schemas.openxmlformats.org/officeDocument/2006/relationships" id="2147483648" r:id="rId1"/>
   </p:sldMasterIdLst>
   <p:notesMasterIdLst>
-    <p:notesMasterId r:id="Rde6def3b69344a22"/>
+    <p:notesMasterId r:id="Rc72da1a87d70483b"/>
   </p:notesMasterIdLst>
   <p:sldIdLst>
-    <p:sldId id="256" r:id="R1d37716b2b6a4e7c"/>
-    <p:sldId id="257" r:id="R94ee387758934c99"/>
-    <p:sldId id="258" r:id="Rda16468cc3d34b8e"/>
-    <p:sldId id="259" r:id="R50bd07de6b0f459a"/>
-    <p:sldId id="260" r:id="Ra7fde7e5712142ac"/>
-    <p:sldId id="261" r:id="R1c48d96a4310473d"/>
+    <p:sldId id="256" r:id="R59ee65a9f0a34a3b"/>
+    <p:sldId id="257" r:id="R9dde4eb38b8b4288"/>
+    <p:sldId id="258" r:id="R95ee766451ca4c5c"/>
+    <p:sldId id="259" r:id="R335c260d8b37487e"/>
+    <p:sldId id="260" r:id="Rfecd17cd8f4d44ac"/>
+    <p:sldId id="261" r:id="Rd18dc928ee0e4e15"/>
+    <p:sldId id="262" r:id="R5503eb4a05e544fb"/>
   </p:sldIdLst>
   <p:sldSz cx="12192000" cy="6858000"/>
   <p:notesSz cx="6858000" cy="9144000"/>
@@ -479,6 +480,30 @@
               <a:t>Cover (template). Period-start planning commit</a:t>
             </a:r>
           </a:p>
+          <a:p xmlns:a="http://schemas.openxmlformats.org/drawingml/2006/main">
+            <a:r>
+              <a:rPr lang="en-US"/>
+              <a:t/>
+            </a:r>
+          </a:p>
+          <a:p xmlns:a="http://schemas.openxmlformats.org/drawingml/2006/main">
+            <a:r>
+              <a:rPr lang="en-US"/>
+              <a:t>Commit / stretch / out period kickoff</a:t>
+            </a:r>
+          </a:p>
+          <a:p xmlns:a="http://schemas.openxmlformats.org/drawingml/2006/main">
+            <a:r>
+              <a:rPr lang="en-US"/>
+              <a:t>EM Tools — Roadmap / planning kickoff norms: https://www.em-tools.io/engineering-manager-responsibilities/roadmap-planning</a:t>
+            </a:r>
+          </a:p>
+          <a:p xmlns:a="http://schemas.openxmlformats.org/drawingml/2006/main">
+            <a:r>
+              <a:rPr lang="en-US"/>
+              <a:t>BLUF executive framing: https://www.getorvo.com/learn/executive-communication-strategy</a:t>
+            </a:r>
+          </a:p>
         </p:txBody>
       </p:sp>
     </p:spTree>
@@ -531,7 +556,19 @@
           <a:p xmlns:a="http://schemas.openxmlformats.org/drawingml/2006/main">
             <a:r>
               <a:rPr lang="en-US"/>
-              <a:t>Shared commitment, not a wish list.</a:t>
+              <a:t>Commit / stretch / out period kickoff</a:t>
+            </a:r>
+          </a:p>
+          <a:p xmlns:a="http://schemas.openxmlformats.org/drawingml/2006/main">
+            <a:r>
+              <a:rPr lang="en-US"/>
+              <a:t>EM Tools — Roadmap / planning kickoff norms: https://www.em-tools.io/engineering-manager-responsibilities/roadmap-planning</a:t>
+            </a:r>
+          </a:p>
+          <a:p xmlns:a="http://schemas.openxmlformats.org/drawingml/2006/main">
+            <a:r>
+              <a:rPr lang="en-US"/>
+              <a:t>BLUF executive framing: https://www.getorvo.com/learn/executive-communication-strategy</a:t>
             </a:r>
           </a:p>
         </p:txBody>
@@ -586,7 +623,7 @@
           <a:p xmlns:a="http://schemas.openxmlformats.org/drawingml/2006/main">
             <a:r>
               <a:rPr lang="en-US"/>
-              <a:t>Verifiable definitions of done.</a:t>
+              <a:t>Shared commitment, not a wish list.</a:t>
             </a:r>
           </a:p>
         </p:txBody>
@@ -641,7 +678,7 @@
           <a:p xmlns:a="http://schemas.openxmlformats.org/drawingml/2006/main">
             <a:r>
               <a:rPr lang="en-US"/>
-              <a:t>Operating system, not just goals.</a:t>
+              <a:t>Verifiable definitions of done.</a:t>
             </a:r>
           </a:p>
         </p:txBody>
@@ -696,7 +733,7 @@
           <a:p xmlns:a="http://schemas.openxmlformats.org/drawingml/2006/main">
             <a:r>
               <a:rPr lang="en-US"/>
-              <a:t>Walk trade-offs; land recommendation.</a:t>
+              <a:t>Operating system, not just goals.</a:t>
             </a:r>
           </a:p>
         </p:txBody>
@@ -710,6 +747,61 @@
 </file>
 
 <file path=ppt/notesSlides/notesSlide6.xml><?xml version="1.0" encoding="utf-8"?>
+<p:notes xmlns:p="http://schemas.openxmlformats.org/presentationml/2006/main">
+  <p:cSld>
+    <p:spTree>
+      <p:nvGrpSpPr>
+        <p:cNvPr id="1" name=""/>
+        <p:cNvGrpSpPr/>
+        <p:nvPr/>
+      </p:nvGrpSpPr>
+      <p:grpSpPr>
+        <a:xfrm xmlns:a="http://schemas.openxmlformats.org/drawingml/2006/main"/>
+      </p:grpSpPr>
+      <p:sp>
+        <p:nvSpPr>
+          <p:cNvPr id="2" name="Slide Image Placeholder 1"/>
+          <p:cNvSpPr/>
+          <p:nvPr>
+            <p:ph type="sldImg" idx="0"/>
+          </p:nvPr>
+        </p:nvSpPr>
+        <p:spPr/>
+        <p:txBody>
+          <a:bodyPr xmlns:a="http://schemas.openxmlformats.org/drawingml/2006/main"/>
+          <a:lstStyle xmlns:a="http://schemas.openxmlformats.org/drawingml/2006/main"/>
+          <a:p xmlns:a="http://schemas.openxmlformats.org/drawingml/2006/main"/>
+        </p:txBody>
+      </p:sp>
+      <p:sp>
+        <p:nvSpPr>
+          <p:cNvPr id="3" name="Notes Placeholder 2"/>
+          <p:cNvSpPr/>
+          <p:nvPr>
+            <p:ph type="body" idx="1"/>
+          </p:nvPr>
+        </p:nvSpPr>
+        <p:spPr/>
+        <p:txBody>
+          <a:bodyPr xmlns:a="http://schemas.openxmlformats.org/drawingml/2006/main"/>
+          <a:lstStyle xmlns:a="http://schemas.openxmlformats.org/drawingml/2006/main"/>
+          <a:p xmlns:a="http://schemas.openxmlformats.org/drawingml/2006/main">
+            <a:r>
+              <a:rPr lang="en-US"/>
+              <a:t>Walk trade-offs; land recommendation.</a:t>
+            </a:r>
+          </a:p>
+        </p:txBody>
+      </p:sp>
+    </p:spTree>
+  </p:cSld>
+  <p:clrMapOvr>
+    <a:masterClrMapping xmlns:a="http://schemas.openxmlformats.org/drawingml/2006/main"/>
+  </p:clrMapOvr>
+</p:notes>
+</file>
+
+<file path=ppt/notesSlides/notesSlide7.xml><?xml version="1.0" encoding="utf-8"?>
 <p:notes xmlns:p="http://schemas.openxmlformats.org/presentationml/2006/main">
   <p:cSld>
     <p:spTree>
@@ -1079,8 +1171,8 @@
         </p:nvSpPr>
         <p:spPr>
           <a:xfrm xmlns:a="http://schemas.openxmlformats.org/drawingml/2006/main">
-            <a:off x="504000" y="1008000"/>
-            <a:ext cx="11088000" cy="324000"/>
+            <a:off x="504000" y="936000"/>
+            <a:ext cx="11088000" cy="306000"/>
           </a:xfrm>
           <a:prstGeom xmlns:a="http://schemas.openxmlformats.org/drawingml/2006/main" prst="rect">
             <a:avLst/>
@@ -1111,8 +1203,8 @@
         </p:nvSpPr>
         <p:spPr>
           <a:xfrm xmlns:a="http://schemas.openxmlformats.org/drawingml/2006/main">
-            <a:off x="504000" y="1440000"/>
-            <a:ext cx="11088000" cy="936000"/>
+            <a:off x="504000" y="1332000"/>
+            <a:ext cx="11088000" cy="900000"/>
           </a:xfrm>
           <a:prstGeom xmlns:a="http://schemas.openxmlformats.org/drawingml/2006/main" prst="rect">
             <a:avLst/>
@@ -1123,7 +1215,7 @@
           <a:lstStyle xmlns:a="http://schemas.openxmlformats.org/drawingml/2006/main"/>
           <a:p xmlns:a="http://schemas.openxmlformats.org/drawingml/2006/main">
             <a:r>
-              <a:rPr lang="en-US" sz="3400" b="1">
+              <a:rPr lang="en-US" sz="3200" b="1">
                 <a:solidFill>
                   <a:srgbClr val="FFFFFF"/>
                 </a:solidFill>
@@ -1143,8 +1235,8 @@
         </p:nvSpPr>
         <p:spPr>
           <a:xfrm xmlns:a="http://schemas.openxmlformats.org/drawingml/2006/main">
-            <a:off x="504000" y="2520000"/>
-            <a:ext cx="11088000" cy="720000"/>
+            <a:off x="504000" y="2340000"/>
+            <a:ext cx="11088000" cy="648000"/>
           </a:xfrm>
           <a:prstGeom xmlns:a="http://schemas.openxmlformats.org/drawingml/2006/main" prst="rect">
             <a:avLst/>
@@ -1155,7 +1247,7 @@
           <a:lstStyle xmlns:a="http://schemas.openxmlformats.org/drawingml/2006/main"/>
           <a:p xmlns:a="http://schemas.openxmlformats.org/drawingml/2006/main">
             <a:r>
-              <a:rPr lang="en-US" sz="1700" b="0">
+              <a:rPr lang="en-US" sz="1600" b="0">
                 <a:solidFill>
                   <a:srgbClr val="CADCFC"/>
                 </a:solidFill>
@@ -1170,6 +1262,38 @@
       <p:sp>
         <p:nvSpPr>
           <p:cNvPr id="100003" name="TextBox 4"/>
+          <p:cNvSpPr txBox="1"/>
+          <p:nvPr/>
+        </p:nvSpPr>
+        <p:spPr>
+          <a:xfrm xmlns:a="http://schemas.openxmlformats.org/drawingml/2006/main">
+            <a:off x="504000" y="3240000"/>
+            <a:ext cx="11088000" cy="576000"/>
+          </a:xfrm>
+          <a:prstGeom xmlns:a="http://schemas.openxmlformats.org/drawingml/2006/main" prst="rect">
+            <a:avLst/>
+          </a:prstGeom>
+        </p:spPr>
+        <p:txBody>
+          <a:bodyPr xmlns:a="http://schemas.openxmlformats.org/drawingml/2006/main"/>
+          <a:lstStyle xmlns:a="http://schemas.openxmlformats.org/drawingml/2006/main"/>
+          <a:p xmlns:a="http://schemas.openxmlformats.org/drawingml/2006/main">
+            <a:r>
+              <a:rPr lang="en-US" sz="1400" b="0">
+                <a:solidFill>
+                  <a:srgbClr val="A0C4E8"/>
+                </a:solidFill>
+                <a:latin typeface="Calibri"/>
+                <a:ea typeface="Calibri"/>
+              </a:rPr>
+              <a:t>Pattern: Commit / stretch / out period kickoff</a:t>
+            </a:r>
+          </a:p>
+        </p:txBody>
+      </p:sp>
+      <p:sp>
+        <p:nvSpPr>
+          <p:cNvPr id="100004" name="TextBox 5"/>
           <p:cNvSpPr txBox="1"/>
           <p:nvPr/>
         </p:nvSpPr>
@@ -1205,6 +1329,279 @@
 </file>
 
 <file path=ppt/slides/slide2.xml><?xml version="1.0" encoding="utf-8"?>
+<p:sld xmlns:p="http://schemas.openxmlformats.org/presentationml/2006/main">
+  <p:cSld name="Pattern provenance">
+    <p:bg>
+      <p:bgPr>
+        <a:solidFill xmlns:a="http://schemas.openxmlformats.org/drawingml/2006/main">
+          <a:srgbClr val="F4F7FC"/>
+        </a:solidFill>
+      </p:bgPr>
+    </p:bg>
+    <p:spTree>
+      <p:nvGrpSpPr>
+        <p:cNvPr id="1" name=""/>
+        <p:cNvGrpSpPr/>
+        <p:nvPr/>
+      </p:nvGrpSpPr>
+      <p:grpSpPr/>
+      <p:sp>
+        <p:nvSpPr>
+          <p:cNvPr id="100005" name="TextBox 1"/>
+          <p:cNvSpPr txBox="1"/>
+          <p:nvPr/>
+        </p:nvSpPr>
+        <p:spPr>
+          <a:xfrm xmlns:a="http://schemas.openxmlformats.org/drawingml/2006/main">
+            <a:off x="504000" y="270000"/>
+            <a:ext cx="11088000" cy="270000"/>
+          </a:xfrm>
+          <a:prstGeom xmlns:a="http://schemas.openxmlformats.org/drawingml/2006/main" prst="rect">
+            <a:avLst/>
+          </a:prstGeom>
+        </p:spPr>
+        <p:txBody>
+          <a:bodyPr xmlns:a="http://schemas.openxmlformats.org/drawingml/2006/main"/>
+          <a:lstStyle xmlns:a="http://schemas.openxmlformats.org/drawingml/2006/main"/>
+          <a:p xmlns:a="http://schemas.openxmlformats.org/drawingml/2006/main">
+            <a:r>
+              <a:rPr lang="en-US" sz="1100" b="1">
+                <a:solidFill>
+                  <a:srgbClr val="2B6CB0"/>
+                </a:solidFill>
+                <a:latin typeface="Calibri"/>
+                <a:ea typeface="Calibri"/>
+              </a:rPr>
+              <a:t>WHERE THIS DECK SHAPE COMES FROM</a:t>
+            </a:r>
+          </a:p>
+        </p:txBody>
+      </p:sp>
+      <p:sp>
+        <p:nvSpPr>
+          <p:cNvPr id="100006" name="TextBox 2"/>
+          <p:cNvSpPr txBox="1"/>
+          <p:nvPr/>
+        </p:nvSpPr>
+        <p:spPr>
+          <a:xfrm xmlns:a="http://schemas.openxmlformats.org/drawingml/2006/main">
+            <a:off x="504000" y="558000"/>
+            <a:ext cx="11088000" cy="612000"/>
+          </a:xfrm>
+          <a:prstGeom xmlns:a="http://schemas.openxmlformats.org/drawingml/2006/main" prst="rect">
+            <a:avLst/>
+          </a:prstGeom>
+        </p:spPr>
+        <p:txBody>
+          <a:bodyPr xmlns:a="http://schemas.openxmlformats.org/drawingml/2006/main"/>
+          <a:lstStyle xmlns:a="http://schemas.openxmlformats.org/drawingml/2006/main"/>
+          <a:p xmlns:a="http://schemas.openxmlformats.org/drawingml/2006/main">
+            <a:r>
+              <a:rPr lang="en-US" sz="2800" b="1">
+                <a:solidFill>
+                  <a:srgbClr val="1A202C"/>
+                </a:solidFill>
+                <a:latin typeface="Calibri"/>
+                <a:ea typeface="Calibri"/>
+              </a:rPr>
+              <a:t>Pattern provenance</a:t>
+            </a:r>
+          </a:p>
+        </p:txBody>
+      </p:sp>
+      <p:sp>
+        <p:nvSpPr>
+          <p:cNvPr id="100007" name="TextBox 3"/>
+          <p:cNvSpPr txBox="1"/>
+          <p:nvPr/>
+        </p:nvSpPr>
+        <p:spPr>
+          <a:xfrm xmlns:a="http://schemas.openxmlformats.org/drawingml/2006/main">
+            <a:off x="504000" y="1260000"/>
+            <a:ext cx="11088000" cy="4860000"/>
+          </a:xfrm>
+          <a:prstGeom xmlns:a="http://schemas.openxmlformats.org/drawingml/2006/main" prst="rect">
+            <a:avLst/>
+          </a:prstGeom>
+          <a:solidFill xmlns:a="http://schemas.openxmlformats.org/drawingml/2006/main">
+            <a:srgbClr val="FFFFFF"/>
+          </a:solidFill>
+        </p:spPr>
+        <p:txBody>
+          <a:bodyPr xmlns:a="http://schemas.openxmlformats.org/drawingml/2006/main"/>
+          <a:lstStyle xmlns:a="http://schemas.openxmlformats.org/drawingml/2006/main"/>
+          <a:p xmlns:a="http://schemas.openxmlformats.org/drawingml/2006/main">
+            <a:r>
+              <a:rPr lang="en-US" sz="1500" b="0">
+                <a:solidFill>
+                  <a:srgbClr val="1A202C"/>
+                </a:solidFill>
+                <a:latin typeface="Calibri"/>
+                <a:ea typeface="Calibri"/>
+              </a:rPr>
+              <a:t>Public pattern (structure only — not a confidential company deck):</a:t>
+            </a:r>
+          </a:p>
+          <a:p xmlns:a="http://schemas.openxmlformats.org/drawingml/2006/main">
+            <a:r>
+              <a:rPr lang="en-US" sz="1500" b="0">
+                <a:solidFill>
+                  <a:srgbClr val="1A202C"/>
+                </a:solidFill>
+                <a:latin typeface="Calibri"/>
+                <a:ea typeface="Calibri"/>
+              </a:rPr>
+              <a:t/>
+            </a:r>
+          </a:p>
+          <a:p xmlns:a="http://schemas.openxmlformats.org/drawingml/2006/main">
+            <a:r>
+              <a:rPr lang="en-US" sz="1500" b="0">
+                <a:solidFill>
+                  <a:srgbClr val="1A202C"/>
+                </a:solidFill>
+                <a:latin typeface="Calibri"/>
+                <a:ea typeface="Calibri"/>
+              </a:rPr>
+              <a:t>Commit / stretch / out period kickoff</a:t>
+            </a:r>
+          </a:p>
+          <a:p xmlns:a="http://schemas.openxmlformats.org/drawingml/2006/main">
+            <a:r>
+              <a:rPr lang="en-US" sz="1500" b="0">
+                <a:solidFill>
+                  <a:srgbClr val="1A202C"/>
+                </a:solidFill>
+                <a:latin typeface="Calibri"/>
+                <a:ea typeface="Calibri"/>
+              </a:rPr>
+              <a:t/>
+            </a:r>
+          </a:p>
+          <a:p xmlns:a="http://schemas.openxmlformats.org/drawingml/2006/main">
+            <a:r>
+              <a:rPr lang="en-US" sz="1500" b="0">
+                <a:solidFill>
+                  <a:srgbClr val="1A202C"/>
+                </a:solidFill>
+                <a:latin typeface="Calibri"/>
+                <a:ea typeface="Calibri"/>
+              </a:rPr>
+              <a:t>• EM Tools — Roadmap / planning kickoff norms</a:t>
+            </a:r>
+          </a:p>
+          <a:p xmlns:a="http://schemas.openxmlformats.org/drawingml/2006/main">
+            <a:r>
+              <a:rPr lang="en-US" sz="1500" b="0">
+                <a:solidFill>
+                  <a:srgbClr val="1A202C"/>
+                </a:solidFill>
+                <a:latin typeface="Calibri"/>
+                <a:ea typeface="Calibri"/>
+              </a:rPr>
+              <a:t>  https://www.em-tools.io/engineering-manager-responsibilities/roadmap-planning</a:t>
+            </a:r>
+          </a:p>
+          <a:p xmlns:a="http://schemas.openxmlformats.org/drawingml/2006/main">
+            <a:r>
+              <a:rPr lang="en-US" sz="1500" b="0">
+                <a:solidFill>
+                  <a:srgbClr val="1A202C"/>
+                </a:solidFill>
+                <a:latin typeface="Calibri"/>
+                <a:ea typeface="Calibri"/>
+              </a:rPr>
+              <a:t>• BLUF executive framing</a:t>
+            </a:r>
+          </a:p>
+          <a:p xmlns:a="http://schemas.openxmlformats.org/drawingml/2006/main">
+            <a:r>
+              <a:rPr lang="en-US" sz="1500" b="0">
+                <a:solidFill>
+                  <a:srgbClr val="1A202C"/>
+                </a:solidFill>
+                <a:latin typeface="Calibri"/>
+                <a:ea typeface="Calibri"/>
+              </a:rPr>
+              <a:t>  https://www.getorvo.com/learn/executive-communication-strategy</a:t>
+            </a:r>
+          </a:p>
+          <a:p xmlns:a="http://schemas.openxmlformats.org/drawingml/2006/main">
+            <a:r>
+              <a:rPr lang="en-US" sz="1500" b="0">
+                <a:solidFill>
+                  <a:srgbClr val="1A202C"/>
+                </a:solidFill>
+                <a:latin typeface="Calibri"/>
+                <a:ea typeface="Calibri"/>
+              </a:rPr>
+              <a:t/>
+            </a:r>
+          </a:p>
+          <a:p xmlns:a="http://schemas.openxmlformats.org/drawingml/2006/main">
+            <a:r>
+              <a:rPr lang="en-US" sz="1500" b="0">
+                <a:solidFill>
+                  <a:srgbClr val="1A202C"/>
+                </a:solidFill>
+                <a:latin typeface="Calibri"/>
+                <a:ea typeface="Calibri"/>
+              </a:rPr>
+              <a:t>How to use: copy section order and decision verbs; replace with your metrics.</a:t>
+            </a:r>
+          </a:p>
+          <a:p xmlns:a="http://schemas.openxmlformats.org/drawingml/2006/main">
+            <a:r>
+              <a:rPr lang="en-US" sz="1500" b="0">
+                <a:solidFill>
+                  <a:srgbClr val="1A202C"/>
+                </a:solidFill>
+                <a:latin typeface="Calibri"/>
+                <a:ea typeface="Calibri"/>
+              </a:rPr>
+              <a:t>In-repo: skills/presentations/classic-public-cases.md</a:t>
+            </a:r>
+          </a:p>
+        </p:txBody>
+      </p:sp>
+      <p:sp>
+        <p:nvSpPr>
+          <p:cNvPr id="100008" name="TextBox 4"/>
+          <p:cNvSpPr txBox="1"/>
+          <p:nvPr/>
+        </p:nvSpPr>
+        <p:spPr>
+          <a:xfrm xmlns:a="http://schemas.openxmlformats.org/drawingml/2006/main">
+            <a:off x="504000" y="6426000"/>
+            <a:ext cx="11088000" cy="306000"/>
+          </a:xfrm>
+          <a:prstGeom xmlns:a="http://schemas.openxmlformats.org/drawingml/2006/main" prst="rect">
+            <a:avLst/>
+          </a:prstGeom>
+        </p:spPr>
+        <p:txBody>
+          <a:bodyPr xmlns:a="http://schemas.openxmlformats.org/drawingml/2006/main"/>
+          <a:lstStyle xmlns:a="http://schemas.openxmlformats.org/drawingml/2006/main"/>
+          <a:p xmlns:a="http://schemas.openxmlformats.org/drawingml/2006/main">
+            <a:r>
+              <a:rPr lang="en-US" sz="1100" b="0">
+                <a:solidFill>
+                  <a:srgbClr val="718096"/>
+                </a:solidFill>
+                <a:latin typeface="Calibri"/>
+                <a:ea typeface="Calibri"/>
+              </a:rPr>
+              <a:t>Team X  ·  Program Alpha  ·  Qn YYYY  ·  TEMPLATE — replace placeholders</a:t>
+            </a:r>
+          </a:p>
+        </p:txBody>
+      </p:sp>
+    </p:spTree>
+  </p:cSld>
+</p:sld>
+</file>
+
+<file path=ppt/slides/slide3.xml><?xml version="1.0" encoding="utf-8"?>
 <p:sld xmlns:p="http://schemas.openxmlformats.org/presentationml/2006/main">
   <p:cSld name="BLUF — period commit">
     <p:bg>
@@ -1223,7 +1620,7 @@
       <p:grpSpPr/>
       <p:sp>
         <p:nvSpPr>
-          <p:cNvPr id="100004" name="TextBox 1"/>
+          <p:cNvPr id="100009" name="TextBox 1"/>
           <p:cNvSpPr txBox="1"/>
           <p:nvPr/>
         </p:nvSpPr>
@@ -1255,7 +1652,7 @@
       </p:sp>
       <p:sp>
         <p:nvSpPr>
-          <p:cNvPr id="100005" name="TextBox 2"/>
+          <p:cNvPr id="100010" name="TextBox 2"/>
           <p:cNvSpPr txBox="1"/>
           <p:nvPr/>
         </p:nvSpPr>
@@ -1287,7 +1684,7 @@
       </p:sp>
       <p:sp>
         <p:nvSpPr>
-          <p:cNvPr id="100006" name="TextBox 3"/>
+          <p:cNvPr id="100011" name="TextBox 3"/>
           <p:cNvSpPr txBox="1"/>
           <p:nvPr/>
         </p:nvSpPr>
@@ -1322,7 +1719,7 @@
       </p:sp>
       <p:sp>
         <p:nvSpPr>
-          <p:cNvPr id="100007" name="TextBox 4"/>
+          <p:cNvPr id="100012" name="TextBox 4"/>
           <p:cNvSpPr txBox="1"/>
           <p:nvPr/>
         </p:nvSpPr>
@@ -1417,7 +1814,7 @@
       </p:sp>
       <p:sp>
         <p:nvSpPr>
-          <p:cNvPr id="100008" name="TextBox 5"/>
+          <p:cNvPr id="100013" name="TextBox 5"/>
           <p:cNvSpPr txBox="1"/>
           <p:nvPr/>
         </p:nvSpPr>
@@ -1452,7 +1849,7 @@
 </p:sld>
 </file>
 
-<file path=ppt/slides/slide3.xml><?xml version="1.0" encoding="utf-8"?>
+<file path=ppt/slides/slide4.xml><?xml version="1.0" encoding="utf-8"?>
 <p:sld xmlns:p="http://schemas.openxmlformats.org/presentationml/2006/main">
   <p:cSld name="Outcomes &amp; success metrics">
     <p:bg>
@@ -1471,7 +1868,7 @@
       <p:grpSpPr/>
       <p:sp>
         <p:nvSpPr>
-          <p:cNvPr id="100009" name="TextBox 1"/>
+          <p:cNvPr id="100014" name="TextBox 1"/>
           <p:cNvSpPr txBox="1"/>
           <p:nvPr/>
         </p:nvSpPr>
@@ -1503,7 +1900,7 @@
       </p:sp>
       <p:sp>
         <p:nvSpPr>
-          <p:cNvPr id="100010" name="TextBox 2"/>
+          <p:cNvPr id="100015" name="TextBox 2"/>
           <p:cNvSpPr txBox="1"/>
           <p:nvPr/>
         </p:nvSpPr>
@@ -1562,7 +1959,7 @@
       </p:sp>
       <p:sp>
         <p:nvSpPr>
-          <p:cNvPr id="100011" name="TextBox 3"/>
+          <p:cNvPr id="100016" name="TextBox 3"/>
           <p:cNvSpPr txBox="1"/>
           <p:nvPr/>
         </p:nvSpPr>
@@ -1597,7 +1994,7 @@
 </p:sld>
 </file>
 
-<file path=ppt/slides/slide4.xml><?xml version="1.0" encoding="utf-8"?>
+<file path=ppt/slides/slide5.xml><?xml version="1.0" encoding="utf-8"?>
 <p:sld xmlns:p="http://schemas.openxmlformats.org/presentationml/2006/main">
   <p:cSld name="Milestones &amp; working agreements">
     <p:bg>
@@ -1616,7 +2013,7 @@
       <p:grpSpPr/>
       <p:sp>
         <p:nvSpPr>
-          <p:cNvPr id="100012" name="TextBox 1"/>
+          <p:cNvPr id="100017" name="TextBox 1"/>
           <p:cNvSpPr txBox="1"/>
           <p:nvPr/>
         </p:nvSpPr>
@@ -1648,7 +2045,7 @@
       </p:sp>
       <p:sp>
         <p:nvSpPr>
-          <p:cNvPr id="100013" name="TextBox 2"/>
+          <p:cNvPr id="100018" name="TextBox 2"/>
           <p:cNvSpPr txBox="1"/>
           <p:nvPr/>
         </p:nvSpPr>
@@ -1695,7 +2092,7 @@
       </p:sp>
       <p:sp>
         <p:nvSpPr>
-          <p:cNvPr id="100014" name="TextBox 3"/>
+          <p:cNvPr id="100019" name="TextBox 3"/>
           <p:cNvSpPr txBox="1"/>
           <p:nvPr/>
         </p:nvSpPr>
@@ -1730,7 +2127,7 @@
 </p:sld>
 </file>
 
-<file path=ppt/slides/slide5.xml><?xml version="1.0" encoding="utf-8"?>
+<file path=ppt/slides/slide6.xml><?xml version="1.0" encoding="utf-8"?>
 <p:sld xmlns:p="http://schemas.openxmlformats.org/presentationml/2006/main">
   <p:cSld name="Options &amp; recommendation">
     <p:bg>
@@ -1749,7 +2146,7 @@
       <p:grpSpPr/>
       <p:sp>
         <p:nvSpPr>
-          <p:cNvPr id="100015" name="TextBox 1"/>
+          <p:cNvPr id="100020" name="TextBox 1"/>
           <p:cNvSpPr txBox="1"/>
           <p:nvPr/>
         </p:nvSpPr>
@@ -1781,7 +2178,7 @@
       </p:sp>
       <p:sp>
         <p:nvSpPr>
-          <p:cNvPr id="100016" name="TextBox 2"/>
+          <p:cNvPr id="100021" name="TextBox 2"/>
           <p:cNvSpPr txBox="1"/>
           <p:nvPr/>
         </p:nvSpPr>
@@ -1813,7 +2210,7 @@
       </p:sp>
       <p:graphicFrame>
         <p:nvGraphicFramePr>
-          <p:cNvPr id="100017" name="Table 1"/>
+          <p:cNvPr id="100022" name="Table 1"/>
           <p:cNvGraphicFramePr/>
           <p:nvPr/>
         </p:nvGraphicFramePr>
@@ -2213,7 +2610,7 @@
       </p:graphicFrame>
       <p:sp>
         <p:nvSpPr>
-          <p:cNvPr id="100018" name="TextBox 3"/>
+          <p:cNvPr id="100023" name="TextBox 3"/>
           <p:cNvSpPr txBox="1"/>
           <p:nvPr/>
         </p:nvSpPr>
@@ -2248,7 +2645,7 @@
 </p:sld>
 </file>
 
-<file path=ppt/slides/slide6.xml><?xml version="1.0" encoding="utf-8"?>
+<file path=ppt/slides/slide7.xml><?xml version="1.0" encoding="utf-8"?>
 <p:sld xmlns:p="http://schemas.openxmlformats.org/presentationml/2006/main">
   <p:cSld name="Decision &amp; ask">
     <p:bg>
@@ -2267,7 +2664,7 @@
       <p:grpSpPr/>
       <p:sp>
         <p:nvSpPr>
-          <p:cNvPr id="100019" name="TextBox 1"/>
+          <p:cNvPr id="100024" name="TextBox 1"/>
           <p:cNvSpPr txBox="1"/>
           <p:nvPr/>
         </p:nvSpPr>
@@ -2299,7 +2696,7 @@
       </p:sp>
       <p:sp>
         <p:nvSpPr>
-          <p:cNvPr id="100020" name="TextBox 2"/>
+          <p:cNvPr id="100025" name="TextBox 2"/>
           <p:cNvSpPr txBox="1"/>
           <p:nvPr/>
         </p:nvSpPr>
@@ -2331,7 +2728,7 @@
       </p:sp>
       <p:sp>
         <p:nvSpPr>
-          <p:cNvPr id="100021" name="TextBox 3"/>
+          <p:cNvPr id="100026" name="TextBox 3"/>
           <p:cNvSpPr txBox="1"/>
           <p:nvPr/>
         </p:nvSpPr>
@@ -2390,7 +2787,7 @@
       </p:sp>
       <p:sp>
         <p:nvSpPr>
-          <p:cNvPr id="100022" name="TextBox 4"/>
+          <p:cNvPr id="100027" name="TextBox 4"/>
           <p:cNvSpPr txBox="1"/>
           <p:nvPr/>
         </p:nvSpPr>

--- a/skills/presentations/assets/pptx/templates/08-period-start-planning.pptx
+++ b/skills/presentations/assets/pptx/templates/08-period-start-planning.pptx
@@ -5,16 +5,16 @@
     <p:sldMasterId xmlns:r="http://schemas.openxmlformats.org/officeDocument/2006/relationships" id="2147483648" r:id="rId1"/>
   </p:sldMasterIdLst>
   <p:notesMasterIdLst>
-    <p:notesMasterId r:id="Rc72da1a87d70483b"/>
+    <p:notesMasterId r:id="R95aabea784154d16"/>
   </p:notesMasterIdLst>
   <p:sldIdLst>
-    <p:sldId id="256" r:id="R59ee65a9f0a34a3b"/>
-    <p:sldId id="257" r:id="R9dde4eb38b8b4288"/>
-    <p:sldId id="258" r:id="R95ee766451ca4c5c"/>
-    <p:sldId id="259" r:id="R335c260d8b37487e"/>
-    <p:sldId id="260" r:id="Rfecd17cd8f4d44ac"/>
-    <p:sldId id="261" r:id="Rd18dc928ee0e4e15"/>
-    <p:sldId id="262" r:id="R5503eb4a05e544fb"/>
+    <p:sldId id="256" r:id="R13e837bb764042cb"/>
+    <p:sldId id="257" r:id="Rf67bf1b22b3741cc"/>
+    <p:sldId id="258" r:id="Ra82f1c703eb74471"/>
+    <p:sldId id="259" r:id="R1c46c25252c84e36"/>
+    <p:sldId id="260" r:id="Raae090e4b5524485"/>
+    <p:sldId id="261" r:id="Rcb4190c2d8694c38"/>
+    <p:sldId id="262" r:id="Re1c401dc3a2d475d"/>
   </p:sldIdLst>
   <p:sldSz cx="12192000" cy="6858000"/>
   <p:notesSz cx="6858000" cy="9144000"/>
@@ -1559,7 +1559,19 @@
                 <a:latin typeface="Calibri"/>
                 <a:ea typeface="Calibri"/>
               </a:rPr>
-              <a:t>In-repo: skills/presentations/classic-public-cases.md</a:t>
+              <a:t>CONTENT TEMPLATE ONLY — do not copy visual design (colors, margins, fonts) as a brand system.</a:t>
+            </a:r>
+          </a:p>
+          <a:p xmlns:a="http://schemas.openxmlformats.org/drawingml/2006/main">
+            <a:r>
+              <a:rPr lang="en-US" sz="1500" b="0">
+                <a:solidFill>
+                  <a:srgbClr val="1A202C"/>
+                </a:solidFill>
+                <a:latin typeface="Calibri"/>
+                <a:ea typeface="Calibri"/>
+              </a:rPr>
+              <a:t>In-repo: skills/presentations/classic-public-cases.md · assets/README.md (agent notice)</a:t>
             </a:r>
           </a:p>
         </p:txBody>
